--- a/ゲーム科2年/00_前期/ゲームエンジンⅢ/バージョン管理/07_編集のコンフリクト.pptx
+++ b/ゲーム科2年/00_前期/ゲームエンジンⅢ/バージョン管理/07_編集のコンフリクト.pptx
@@ -268,7 +268,7 @@
           <a:p>
             <a:fld id="{E9CC885B-4903-4D54-9A93-00025F12DED9}" type="datetimeFigureOut">
               <a:rPr kumimoji="1" lang="ja-JP" altLang="en-US" smtClean="0"/>
-              <a:t>2025/1/16</a:t>
+              <a:t>2025/1/17</a:t>
             </a:fld>
             <a:endParaRPr kumimoji="1" lang="ja-JP" altLang="en-US"/>
           </a:p>
@@ -498,7 +498,7 @@
           <a:p>
             <a:fld id="{E9CC885B-4903-4D54-9A93-00025F12DED9}" type="datetimeFigureOut">
               <a:rPr kumimoji="1" lang="ja-JP" altLang="en-US" smtClean="0"/>
-              <a:t>2025/1/16</a:t>
+              <a:t>2025/1/17</a:t>
             </a:fld>
             <a:endParaRPr kumimoji="1" lang="ja-JP" altLang="en-US"/>
           </a:p>
@@ -738,7 +738,7 @@
           <a:p>
             <a:fld id="{E9CC885B-4903-4D54-9A93-00025F12DED9}" type="datetimeFigureOut">
               <a:rPr kumimoji="1" lang="ja-JP" altLang="en-US" smtClean="0"/>
-              <a:t>2025/1/16</a:t>
+              <a:t>2025/1/17</a:t>
             </a:fld>
             <a:endParaRPr kumimoji="1" lang="ja-JP" altLang="en-US"/>
           </a:p>
@@ -968,7 +968,7 @@
           <a:p>
             <a:fld id="{E9CC885B-4903-4D54-9A93-00025F12DED9}" type="datetimeFigureOut">
               <a:rPr kumimoji="1" lang="ja-JP" altLang="en-US" smtClean="0"/>
-              <a:t>2025/1/16</a:t>
+              <a:t>2025/1/17</a:t>
             </a:fld>
             <a:endParaRPr kumimoji="1" lang="ja-JP" altLang="en-US"/>
           </a:p>
@@ -1243,7 +1243,7 @@
           <a:p>
             <a:fld id="{E9CC885B-4903-4D54-9A93-00025F12DED9}" type="datetimeFigureOut">
               <a:rPr kumimoji="1" lang="ja-JP" altLang="en-US" smtClean="0"/>
-              <a:t>2025/1/16</a:t>
+              <a:t>2025/1/17</a:t>
             </a:fld>
             <a:endParaRPr kumimoji="1" lang="ja-JP" altLang="en-US"/>
           </a:p>
@@ -1572,7 +1572,7 @@
           <a:p>
             <a:fld id="{E9CC885B-4903-4D54-9A93-00025F12DED9}" type="datetimeFigureOut">
               <a:rPr kumimoji="1" lang="ja-JP" altLang="en-US" smtClean="0"/>
-              <a:t>2025/1/16</a:t>
+              <a:t>2025/1/17</a:t>
             </a:fld>
             <a:endParaRPr kumimoji="1" lang="ja-JP" altLang="en-US"/>
           </a:p>
@@ -2048,7 +2048,7 @@
           <a:p>
             <a:fld id="{E9CC885B-4903-4D54-9A93-00025F12DED9}" type="datetimeFigureOut">
               <a:rPr kumimoji="1" lang="ja-JP" altLang="en-US" smtClean="0"/>
-              <a:t>2025/1/16</a:t>
+              <a:t>2025/1/17</a:t>
             </a:fld>
             <a:endParaRPr kumimoji="1" lang="ja-JP" altLang="en-US"/>
           </a:p>
@@ -2189,7 +2189,7 @@
           <a:p>
             <a:fld id="{E9CC885B-4903-4D54-9A93-00025F12DED9}" type="datetimeFigureOut">
               <a:rPr kumimoji="1" lang="ja-JP" altLang="en-US" smtClean="0"/>
-              <a:t>2025/1/16</a:t>
+              <a:t>2025/1/17</a:t>
             </a:fld>
             <a:endParaRPr kumimoji="1" lang="ja-JP" altLang="en-US"/>
           </a:p>
@@ -2302,7 +2302,7 @@
           <a:p>
             <a:fld id="{E9CC885B-4903-4D54-9A93-00025F12DED9}" type="datetimeFigureOut">
               <a:rPr kumimoji="1" lang="ja-JP" altLang="en-US" smtClean="0"/>
-              <a:t>2025/1/16</a:t>
+              <a:t>2025/1/17</a:t>
             </a:fld>
             <a:endParaRPr kumimoji="1" lang="ja-JP" altLang="en-US"/>
           </a:p>
@@ -2645,7 +2645,7 @@
           <a:p>
             <a:fld id="{E9CC885B-4903-4D54-9A93-00025F12DED9}" type="datetimeFigureOut">
               <a:rPr kumimoji="1" lang="ja-JP" altLang="en-US" smtClean="0"/>
-              <a:t>2025/1/16</a:t>
+              <a:t>2025/1/17</a:t>
             </a:fld>
             <a:endParaRPr kumimoji="1" lang="ja-JP" altLang="en-US"/>
           </a:p>
@@ -2933,7 +2933,7 @@
           <a:p>
             <a:fld id="{E9CC885B-4903-4D54-9A93-00025F12DED9}" type="datetimeFigureOut">
               <a:rPr kumimoji="1" lang="ja-JP" altLang="en-US" smtClean="0"/>
-              <a:t>2025/1/16</a:t>
+              <a:t>2025/1/17</a:t>
             </a:fld>
             <a:endParaRPr kumimoji="1" lang="ja-JP" altLang="en-US"/>
           </a:p>
@@ -3206,7 +3206,7 @@
           <a:p>
             <a:fld id="{E9CC885B-4903-4D54-9A93-00025F12DED9}" type="datetimeFigureOut">
               <a:rPr kumimoji="1" lang="ja-JP" altLang="en-US" smtClean="0"/>
-              <a:t>2025/1/16</a:t>
+              <a:t>2025/1/17</a:t>
             </a:fld>
             <a:endParaRPr kumimoji="1" lang="ja-JP" altLang="en-US"/>
           </a:p>
@@ -3932,7 +3932,7 @@
           <a:p>
             <a:r>
               <a:rPr lang="ja-JP" altLang="en-US" sz="2400" dirty="0"/>
-              <a:t>　気を付けましょう</a:t>
+              <a:t>　気を付けましょう。（インスペクタを編集したときなど）</a:t>
             </a:r>
             <a:endParaRPr lang="en-US" altLang="ja-JP" sz="2400" dirty="0"/>
           </a:p>
@@ -4054,7 +4054,7 @@
           <a:p>
             <a:r>
               <a:rPr lang="ja-JP" altLang="en-US" sz="2400" dirty="0"/>
-              <a:t>先の人とは違うメンバーを１人選び、</a:t>
+              <a:t>前の人とは違うメンバーを１人選び、</a:t>
             </a:r>
             <a:endParaRPr lang="en-US" altLang="ja-JP" sz="2400" dirty="0"/>
           </a:p>
@@ -4229,7 +4229,7 @@
         <p:spPr>
           <a:xfrm>
             <a:off x="567542" y="1216429"/>
-            <a:ext cx="11572399" cy="2308324"/>
+            <a:ext cx="11099513" cy="2308324"/>
           </a:xfrm>
           <a:prstGeom prst="rect">
             <a:avLst/>
@@ -4251,32 +4251,7 @@
           <a:p>
             <a:r>
               <a:rPr lang="ja-JP" altLang="en-US" sz="2400" dirty="0"/>
-              <a:t>「ファイルが最新ではないのに編集してます。最新を</a:t>
-            </a:r>
-            <a:r>
-              <a:rPr lang="en-US" altLang="ja-JP" sz="2400" dirty="0"/>
-              <a:t>Pull</a:t>
-            </a:r>
-            <a:r>
-              <a:rPr lang="ja-JP" altLang="en-US" sz="2400" dirty="0"/>
-              <a:t>してください。」</a:t>
-            </a:r>
-            <a:endParaRPr lang="en-US" altLang="ja-JP" sz="2400" dirty="0"/>
-          </a:p>
-          <a:p>
-            <a:r>
-              <a:rPr lang="ja-JP" altLang="en-US" sz="2400" dirty="0"/>
-              <a:t>というエラーになります。</a:t>
-            </a:r>
-            <a:endParaRPr lang="en-US" altLang="ja-JP" sz="2400" dirty="0"/>
-          </a:p>
-          <a:p>
-            <a:endParaRPr lang="en-US" altLang="ja-JP" sz="2400" dirty="0"/>
-          </a:p>
-          <a:p>
-            <a:r>
-              <a:rPr lang="ja-JP" altLang="en-US" sz="2400" dirty="0"/>
-              <a:t>このように</a:t>
+              <a:t>「</a:t>
             </a:r>
             <a:r>
               <a:rPr lang="ja-JP" altLang="en-US" sz="2400" b="1" dirty="0">
@@ -4284,7 +4259,68 @@
                   <a:srgbClr val="FF0000"/>
                 </a:solidFill>
               </a:rPr>
-              <a:t>最新の状態でないファイルを編集してコミットするとエラー</a:t>
+              <a:t>ファイルが最新ではないのに編集してます。最新を</a:t>
+            </a:r>
+            <a:r>
+              <a:rPr lang="en-US" altLang="ja-JP" sz="2400" b="1" dirty="0">
+                <a:solidFill>
+                  <a:srgbClr val="FF0000"/>
+                </a:solidFill>
+              </a:rPr>
+              <a:t>Pull</a:t>
+            </a:r>
+            <a:r>
+              <a:rPr lang="ja-JP" altLang="en-US" sz="2400" b="1" dirty="0">
+                <a:solidFill>
+                  <a:srgbClr val="FF0000"/>
+                </a:solidFill>
+              </a:rPr>
+              <a:t>してください。</a:t>
+            </a:r>
+            <a:r>
+              <a:rPr lang="ja-JP" altLang="en-US" sz="2400" dirty="0"/>
+              <a:t>」</a:t>
+            </a:r>
+            <a:endParaRPr lang="en-US" altLang="ja-JP" sz="2400" dirty="0"/>
+          </a:p>
+          <a:p>
+            <a:r>
+              <a:rPr lang="ja-JP" altLang="en-US" sz="2400" dirty="0"/>
+              <a:t>というエラーになります。</a:t>
+            </a:r>
+            <a:endParaRPr lang="en-US" altLang="ja-JP" sz="2400" dirty="0"/>
+          </a:p>
+          <a:p>
+            <a:endParaRPr lang="en-US" altLang="ja-JP" sz="2400" dirty="0"/>
+          </a:p>
+          <a:p>
+            <a:r>
+              <a:rPr lang="ja-JP" altLang="en-US" sz="2400" dirty="0"/>
+              <a:t>このように</a:t>
+            </a:r>
+            <a:r>
+              <a:rPr lang="ja-JP" altLang="en-US" sz="2400" b="1" dirty="0">
+                <a:solidFill>
+                  <a:srgbClr val="FF0000"/>
+                </a:solidFill>
+              </a:rPr>
+              <a:t>最新の状態でないファイルを編集して</a:t>
+            </a:r>
+            <a:r>
+              <a:rPr lang="en-US" altLang="ja-JP" sz="2400" b="1" dirty="0">
+                <a:solidFill>
+                  <a:srgbClr val="FF0000"/>
+                </a:solidFill>
+              </a:rPr>
+              <a:t>Push</a:t>
+            </a:r>
+            <a:r>
+              <a:rPr lang="ja-JP" altLang="en-US" sz="2400" b="1" dirty="0">
+                <a:solidFill>
+                  <a:srgbClr val="FF0000"/>
+                </a:solidFill>
+              </a:rPr>
+              <a:t>するとエラー</a:t>
             </a:r>
             <a:r>
               <a:rPr lang="ja-JP" altLang="en-US" sz="2400" dirty="0"/>

--- a/ゲーム科2年/00_前期/ゲームエンジンⅢ/バージョン管理/07_編集のコンフリクト.pptx
+++ b/ゲーム科2年/00_前期/ゲームエンジンⅢ/バージョン管理/07_編集のコンフリクト.pptx
@@ -268,7 +268,7 @@
           <a:p>
             <a:fld id="{E9CC885B-4903-4D54-9A93-00025F12DED9}" type="datetimeFigureOut">
               <a:rPr kumimoji="1" lang="ja-JP" altLang="en-US" smtClean="0"/>
-              <a:t>2025/1/17</a:t>
+              <a:t>2025/1/27</a:t>
             </a:fld>
             <a:endParaRPr kumimoji="1" lang="ja-JP" altLang="en-US"/>
           </a:p>
@@ -498,7 +498,7 @@
           <a:p>
             <a:fld id="{E9CC885B-4903-4D54-9A93-00025F12DED9}" type="datetimeFigureOut">
               <a:rPr kumimoji="1" lang="ja-JP" altLang="en-US" smtClean="0"/>
-              <a:t>2025/1/17</a:t>
+              <a:t>2025/1/27</a:t>
             </a:fld>
             <a:endParaRPr kumimoji="1" lang="ja-JP" altLang="en-US"/>
           </a:p>
@@ -738,7 +738,7 @@
           <a:p>
             <a:fld id="{E9CC885B-4903-4D54-9A93-00025F12DED9}" type="datetimeFigureOut">
               <a:rPr kumimoji="1" lang="ja-JP" altLang="en-US" smtClean="0"/>
-              <a:t>2025/1/17</a:t>
+              <a:t>2025/1/27</a:t>
             </a:fld>
             <a:endParaRPr kumimoji="1" lang="ja-JP" altLang="en-US"/>
           </a:p>
@@ -968,7 +968,7 @@
           <a:p>
             <a:fld id="{E9CC885B-4903-4D54-9A93-00025F12DED9}" type="datetimeFigureOut">
               <a:rPr kumimoji="1" lang="ja-JP" altLang="en-US" smtClean="0"/>
-              <a:t>2025/1/17</a:t>
+              <a:t>2025/1/27</a:t>
             </a:fld>
             <a:endParaRPr kumimoji="1" lang="ja-JP" altLang="en-US"/>
           </a:p>
@@ -1243,7 +1243,7 @@
           <a:p>
             <a:fld id="{E9CC885B-4903-4D54-9A93-00025F12DED9}" type="datetimeFigureOut">
               <a:rPr kumimoji="1" lang="ja-JP" altLang="en-US" smtClean="0"/>
-              <a:t>2025/1/17</a:t>
+              <a:t>2025/1/27</a:t>
             </a:fld>
             <a:endParaRPr kumimoji="1" lang="ja-JP" altLang="en-US"/>
           </a:p>
@@ -1572,7 +1572,7 @@
           <a:p>
             <a:fld id="{E9CC885B-4903-4D54-9A93-00025F12DED9}" type="datetimeFigureOut">
               <a:rPr kumimoji="1" lang="ja-JP" altLang="en-US" smtClean="0"/>
-              <a:t>2025/1/17</a:t>
+              <a:t>2025/1/27</a:t>
             </a:fld>
             <a:endParaRPr kumimoji="1" lang="ja-JP" altLang="en-US"/>
           </a:p>
@@ -2048,7 +2048,7 @@
           <a:p>
             <a:fld id="{E9CC885B-4903-4D54-9A93-00025F12DED9}" type="datetimeFigureOut">
               <a:rPr kumimoji="1" lang="ja-JP" altLang="en-US" smtClean="0"/>
-              <a:t>2025/1/17</a:t>
+              <a:t>2025/1/27</a:t>
             </a:fld>
             <a:endParaRPr kumimoji="1" lang="ja-JP" altLang="en-US"/>
           </a:p>
@@ -2189,7 +2189,7 @@
           <a:p>
             <a:fld id="{E9CC885B-4903-4D54-9A93-00025F12DED9}" type="datetimeFigureOut">
               <a:rPr kumimoji="1" lang="ja-JP" altLang="en-US" smtClean="0"/>
-              <a:t>2025/1/17</a:t>
+              <a:t>2025/1/27</a:t>
             </a:fld>
             <a:endParaRPr kumimoji="1" lang="ja-JP" altLang="en-US"/>
           </a:p>
@@ -2302,7 +2302,7 @@
           <a:p>
             <a:fld id="{E9CC885B-4903-4D54-9A93-00025F12DED9}" type="datetimeFigureOut">
               <a:rPr kumimoji="1" lang="ja-JP" altLang="en-US" smtClean="0"/>
-              <a:t>2025/1/17</a:t>
+              <a:t>2025/1/27</a:t>
             </a:fld>
             <a:endParaRPr kumimoji="1" lang="ja-JP" altLang="en-US"/>
           </a:p>
@@ -2645,7 +2645,7 @@
           <a:p>
             <a:fld id="{E9CC885B-4903-4D54-9A93-00025F12DED9}" type="datetimeFigureOut">
               <a:rPr kumimoji="1" lang="ja-JP" altLang="en-US" smtClean="0"/>
-              <a:t>2025/1/17</a:t>
+              <a:t>2025/1/27</a:t>
             </a:fld>
             <a:endParaRPr kumimoji="1" lang="ja-JP" altLang="en-US"/>
           </a:p>
@@ -2933,7 +2933,7 @@
           <a:p>
             <a:fld id="{E9CC885B-4903-4D54-9A93-00025F12DED9}" type="datetimeFigureOut">
               <a:rPr kumimoji="1" lang="ja-JP" altLang="en-US" smtClean="0"/>
-              <a:t>2025/1/17</a:t>
+              <a:t>2025/1/27</a:t>
             </a:fld>
             <a:endParaRPr kumimoji="1" lang="ja-JP" altLang="en-US"/>
           </a:p>
@@ -3206,7 +3206,7 @@
           <a:p>
             <a:fld id="{E9CC885B-4903-4D54-9A93-00025F12DED9}" type="datetimeFigureOut">
               <a:rPr kumimoji="1" lang="ja-JP" altLang="en-US" smtClean="0"/>
-              <a:t>2025/1/17</a:t>
+              <a:t>2025/1/27</a:t>
             </a:fld>
             <a:endParaRPr kumimoji="1" lang="ja-JP" altLang="en-US"/>
           </a:p>
@@ -4660,6 +4660,273 @@
           </a:p>
         </p:txBody>
       </p:sp>
+      <p:pic>
+        <p:nvPicPr>
+          <p:cNvPr id="5" name="Picture 2" descr="後ろから見たパソコンを使う人のイラスト（男性）">
+            <a:extLst>
+              <a:ext uri="{FF2B5EF4-FFF2-40B4-BE49-F238E27FC236}">
+                <a16:creationId xmlns:a16="http://schemas.microsoft.com/office/drawing/2014/main" id="{651AD059-243A-432C-B192-E85AF0496F57}"/>
+              </a:ext>
+            </a:extLst>
+          </p:cNvPr>
+          <p:cNvPicPr>
+            <a:picLocks noChangeAspect="1" noChangeArrowheads="1"/>
+          </p:cNvPicPr>
+          <p:nvPr/>
+        </p:nvPicPr>
+        <p:blipFill>
+          <a:blip r:embed="rId2">
+            <a:extLst>
+              <a:ext uri="{28A0092B-C50C-407E-A947-70E740481C1C}">
+                <a14:useLocalDpi xmlns:a14="http://schemas.microsoft.com/office/drawing/2010/main" val="0"/>
+              </a:ext>
+            </a:extLst>
+          </a:blip>
+          <a:srcRect/>
+          <a:stretch>
+            <a:fillRect/>
+          </a:stretch>
+        </p:blipFill>
+        <p:spPr bwMode="auto">
+          <a:xfrm>
+            <a:off x="567542" y="3702580"/>
+            <a:ext cx="2923977" cy="2434212"/>
+          </a:xfrm>
+          <a:prstGeom prst="rect">
+            <a:avLst/>
+          </a:prstGeom>
+          <a:noFill/>
+          <a:extLst>
+            <a:ext uri="{909E8E84-426E-40DD-AFC4-6F175D3DCCD1}">
+              <a14:hiddenFill xmlns:a14="http://schemas.microsoft.com/office/drawing/2010/main">
+                <a:solidFill>
+                  <a:srgbClr val="FFFFFF"/>
+                </a:solidFill>
+              </a14:hiddenFill>
+            </a:ext>
+          </a:extLst>
+        </p:spPr>
+      </p:pic>
+      <p:sp>
+        <p:nvSpPr>
+          <p:cNvPr id="2" name="思考の吹き出し: 雲形 1">
+            <a:extLst>
+              <a:ext uri="{FF2B5EF4-FFF2-40B4-BE49-F238E27FC236}">
+                <a16:creationId xmlns:a16="http://schemas.microsoft.com/office/drawing/2014/main" id="{3EF74D8E-E3CA-44C3-9B94-89F4AB810CFB}"/>
+              </a:ext>
+            </a:extLst>
+          </p:cNvPr>
+          <p:cNvSpPr/>
+          <p:nvPr/>
+        </p:nvSpPr>
+        <p:spPr>
+          <a:xfrm>
+            <a:off x="3491519" y="3702580"/>
+            <a:ext cx="2133600" cy="1377420"/>
+          </a:xfrm>
+          <a:prstGeom prst="cloudCallout">
+            <a:avLst>
+              <a:gd name="adj1" fmla="val -60912"/>
+              <a:gd name="adj2" fmla="val 34225"/>
+            </a:avLst>
+          </a:prstGeom>
+        </p:spPr>
+        <p:style>
+          <a:lnRef idx="2">
+            <a:schemeClr val="accent1">
+              <a:shade val="50000"/>
+            </a:schemeClr>
+          </a:lnRef>
+          <a:fillRef idx="1">
+            <a:schemeClr val="accent1"/>
+          </a:fillRef>
+          <a:effectRef idx="0">
+            <a:schemeClr val="accent1"/>
+          </a:effectRef>
+          <a:fontRef idx="minor">
+            <a:schemeClr val="lt1"/>
+          </a:fontRef>
+        </p:style>
+        <p:txBody>
+          <a:bodyPr rtlCol="0" anchor="ctr"/>
+          <a:lstStyle/>
+          <a:p>
+            <a:pPr algn="ctr"/>
+            <a:r>
+              <a:rPr kumimoji="1" lang="en-US" altLang="ja-JP" b="1" dirty="0"/>
+              <a:t>HP</a:t>
+            </a:r>
+            <a:r>
+              <a:rPr kumimoji="1" lang="ja-JP" altLang="en-US" b="1" dirty="0"/>
+              <a:t>は</a:t>
+            </a:r>
+            <a:r>
+              <a:rPr kumimoji="1" lang="en-US" altLang="ja-JP" b="1" dirty="0"/>
+              <a:t>300</a:t>
+            </a:r>
+            <a:endParaRPr kumimoji="1" lang="ja-JP" altLang="en-US" b="1" dirty="0"/>
+          </a:p>
+        </p:txBody>
+      </p:sp>
+      <p:pic>
+        <p:nvPicPr>
+          <p:cNvPr id="10" name="Picture 2" descr="後ろから見たパソコンを使う人のイラスト（男性）">
+            <a:extLst>
+              <a:ext uri="{FF2B5EF4-FFF2-40B4-BE49-F238E27FC236}">
+                <a16:creationId xmlns:a16="http://schemas.microsoft.com/office/drawing/2014/main" id="{B459B74E-9F48-4633-9E0D-747810649828}"/>
+              </a:ext>
+            </a:extLst>
+          </p:cNvPr>
+          <p:cNvPicPr>
+            <a:picLocks noChangeAspect="1" noChangeArrowheads="1"/>
+          </p:cNvPicPr>
+          <p:nvPr/>
+        </p:nvPicPr>
+        <p:blipFill>
+          <a:blip r:embed="rId2">
+            <a:extLst>
+              <a:ext uri="{28A0092B-C50C-407E-A947-70E740481C1C}">
+                <a14:useLocalDpi xmlns:a14="http://schemas.microsoft.com/office/drawing/2010/main" val="0"/>
+              </a:ext>
+            </a:extLst>
+          </a:blip>
+          <a:srcRect/>
+          <a:stretch>
+            <a:fillRect/>
+          </a:stretch>
+        </p:blipFill>
+        <p:spPr bwMode="auto">
+          <a:xfrm>
+            <a:off x="6415496" y="3702580"/>
+            <a:ext cx="2923977" cy="2434212"/>
+          </a:xfrm>
+          <a:prstGeom prst="rect">
+            <a:avLst/>
+          </a:prstGeom>
+          <a:noFill/>
+          <a:extLst>
+            <a:ext uri="{909E8E84-426E-40DD-AFC4-6F175D3DCCD1}">
+              <a14:hiddenFill xmlns:a14="http://schemas.microsoft.com/office/drawing/2010/main">
+                <a:solidFill>
+                  <a:srgbClr val="FFFFFF"/>
+                </a:solidFill>
+              </a14:hiddenFill>
+            </a:ext>
+          </a:extLst>
+        </p:spPr>
+      </p:pic>
+      <p:sp>
+        <p:nvSpPr>
+          <p:cNvPr id="11" name="思考の吹き出し: 雲形 10">
+            <a:extLst>
+              <a:ext uri="{FF2B5EF4-FFF2-40B4-BE49-F238E27FC236}">
+                <a16:creationId xmlns:a16="http://schemas.microsoft.com/office/drawing/2014/main" id="{14E4C8FB-9AC9-40AC-B097-ACC7E08CEFA3}"/>
+              </a:ext>
+            </a:extLst>
+          </p:cNvPr>
+          <p:cNvSpPr/>
+          <p:nvPr/>
+        </p:nvSpPr>
+        <p:spPr>
+          <a:xfrm>
+            <a:off x="9339473" y="3702580"/>
+            <a:ext cx="2133600" cy="1377420"/>
+          </a:xfrm>
+          <a:prstGeom prst="cloudCallout">
+            <a:avLst>
+              <a:gd name="adj1" fmla="val -60912"/>
+              <a:gd name="adj2" fmla="val 34225"/>
+            </a:avLst>
+          </a:prstGeom>
+        </p:spPr>
+        <p:style>
+          <a:lnRef idx="2">
+            <a:schemeClr val="accent1">
+              <a:shade val="50000"/>
+            </a:schemeClr>
+          </a:lnRef>
+          <a:fillRef idx="1">
+            <a:schemeClr val="accent1"/>
+          </a:fillRef>
+          <a:effectRef idx="0">
+            <a:schemeClr val="accent1"/>
+          </a:effectRef>
+          <a:fontRef idx="minor">
+            <a:schemeClr val="lt1"/>
+          </a:fontRef>
+        </p:style>
+        <p:txBody>
+          <a:bodyPr rtlCol="0" anchor="ctr"/>
+          <a:lstStyle/>
+          <a:p>
+            <a:pPr algn="ctr"/>
+            <a:r>
+              <a:rPr kumimoji="1" lang="en-US" altLang="ja-JP" b="1" dirty="0"/>
+              <a:t>HP</a:t>
+            </a:r>
+            <a:r>
+              <a:rPr kumimoji="1" lang="ja-JP" altLang="en-US" b="1" dirty="0"/>
+              <a:t>は</a:t>
+            </a:r>
+            <a:r>
+              <a:rPr kumimoji="1" lang="en-US" altLang="ja-JP" b="1" dirty="0"/>
+              <a:t>500</a:t>
+            </a:r>
+            <a:endParaRPr kumimoji="1" lang="ja-JP" altLang="en-US" b="1" dirty="0"/>
+          </a:p>
+        </p:txBody>
+      </p:sp>
+      <p:sp>
+        <p:nvSpPr>
+          <p:cNvPr id="3" name="爆発: 8 pt 2">
+            <a:extLst>
+              <a:ext uri="{FF2B5EF4-FFF2-40B4-BE49-F238E27FC236}">
+                <a16:creationId xmlns:a16="http://schemas.microsoft.com/office/drawing/2014/main" id="{CB73D370-A21F-4FEE-BA4F-AE17FFF08F4B}"/>
+              </a:ext>
+            </a:extLst>
+          </p:cNvPr>
+          <p:cNvSpPr/>
+          <p:nvPr/>
+        </p:nvSpPr>
+        <p:spPr>
+          <a:xfrm>
+            <a:off x="4558319" y="4600171"/>
+            <a:ext cx="2923977" cy="2082800"/>
+          </a:xfrm>
+          <a:prstGeom prst="irregularSeal1">
+            <a:avLst/>
+          </a:prstGeom>
+        </p:spPr>
+        <p:style>
+          <a:lnRef idx="3">
+            <a:schemeClr val="lt1"/>
+          </a:lnRef>
+          <a:fillRef idx="1">
+            <a:schemeClr val="accent4"/>
+          </a:fillRef>
+          <a:effectRef idx="1">
+            <a:schemeClr val="accent4"/>
+          </a:effectRef>
+          <a:fontRef idx="minor">
+            <a:schemeClr val="lt1"/>
+          </a:fontRef>
+        </p:style>
+        <p:txBody>
+          <a:bodyPr rtlCol="0" anchor="ctr"/>
+          <a:lstStyle/>
+          <a:p>
+            <a:pPr algn="ctr"/>
+            <a:r>
+              <a:rPr kumimoji="1" lang="ja-JP" altLang="en-US" b="1" dirty="0">
+                <a:solidFill>
+                  <a:srgbClr val="FF0000"/>
+                </a:solidFill>
+              </a:rPr>
+              <a:t>衝突！！</a:t>
+            </a:r>
+          </a:p>
+        </p:txBody>
+      </p:sp>
     </p:spTree>
     <p:extLst>
       <p:ext uri="{BB962C8B-B14F-4D97-AF65-F5344CB8AC3E}">

--- a/ゲーム科2年/00_前期/ゲームエンジンⅢ/バージョン管理/07_編集のコンフリクト.pptx
+++ b/ゲーム科2年/00_前期/ゲームエンジンⅢ/バージョン管理/07_編集のコンフリクト.pptx
@@ -268,7 +268,7 @@
           <a:p>
             <a:fld id="{E9CC885B-4903-4D54-9A93-00025F12DED9}" type="datetimeFigureOut">
               <a:rPr kumimoji="1" lang="ja-JP" altLang="en-US" smtClean="0"/>
-              <a:t>2025/1/27</a:t>
+              <a:t>2025/2/27</a:t>
             </a:fld>
             <a:endParaRPr kumimoji="1" lang="ja-JP" altLang="en-US"/>
           </a:p>
@@ -498,7 +498,7 @@
           <a:p>
             <a:fld id="{E9CC885B-4903-4D54-9A93-00025F12DED9}" type="datetimeFigureOut">
               <a:rPr kumimoji="1" lang="ja-JP" altLang="en-US" smtClean="0"/>
-              <a:t>2025/1/27</a:t>
+              <a:t>2025/2/27</a:t>
             </a:fld>
             <a:endParaRPr kumimoji="1" lang="ja-JP" altLang="en-US"/>
           </a:p>
@@ -738,7 +738,7 @@
           <a:p>
             <a:fld id="{E9CC885B-4903-4D54-9A93-00025F12DED9}" type="datetimeFigureOut">
               <a:rPr kumimoji="1" lang="ja-JP" altLang="en-US" smtClean="0"/>
-              <a:t>2025/1/27</a:t>
+              <a:t>2025/2/27</a:t>
             </a:fld>
             <a:endParaRPr kumimoji="1" lang="ja-JP" altLang="en-US"/>
           </a:p>
@@ -968,7 +968,7 @@
           <a:p>
             <a:fld id="{E9CC885B-4903-4D54-9A93-00025F12DED9}" type="datetimeFigureOut">
               <a:rPr kumimoji="1" lang="ja-JP" altLang="en-US" smtClean="0"/>
-              <a:t>2025/1/27</a:t>
+              <a:t>2025/2/27</a:t>
             </a:fld>
             <a:endParaRPr kumimoji="1" lang="ja-JP" altLang="en-US"/>
           </a:p>
@@ -1243,7 +1243,7 @@
           <a:p>
             <a:fld id="{E9CC885B-4903-4D54-9A93-00025F12DED9}" type="datetimeFigureOut">
               <a:rPr kumimoji="1" lang="ja-JP" altLang="en-US" smtClean="0"/>
-              <a:t>2025/1/27</a:t>
+              <a:t>2025/2/27</a:t>
             </a:fld>
             <a:endParaRPr kumimoji="1" lang="ja-JP" altLang="en-US"/>
           </a:p>
@@ -1572,7 +1572,7 @@
           <a:p>
             <a:fld id="{E9CC885B-4903-4D54-9A93-00025F12DED9}" type="datetimeFigureOut">
               <a:rPr kumimoji="1" lang="ja-JP" altLang="en-US" smtClean="0"/>
-              <a:t>2025/1/27</a:t>
+              <a:t>2025/2/27</a:t>
             </a:fld>
             <a:endParaRPr kumimoji="1" lang="ja-JP" altLang="en-US"/>
           </a:p>
@@ -2048,7 +2048,7 @@
           <a:p>
             <a:fld id="{E9CC885B-4903-4D54-9A93-00025F12DED9}" type="datetimeFigureOut">
               <a:rPr kumimoji="1" lang="ja-JP" altLang="en-US" smtClean="0"/>
-              <a:t>2025/1/27</a:t>
+              <a:t>2025/2/27</a:t>
             </a:fld>
             <a:endParaRPr kumimoji="1" lang="ja-JP" altLang="en-US"/>
           </a:p>
@@ -2189,7 +2189,7 @@
           <a:p>
             <a:fld id="{E9CC885B-4903-4D54-9A93-00025F12DED9}" type="datetimeFigureOut">
               <a:rPr kumimoji="1" lang="ja-JP" altLang="en-US" smtClean="0"/>
-              <a:t>2025/1/27</a:t>
+              <a:t>2025/2/27</a:t>
             </a:fld>
             <a:endParaRPr kumimoji="1" lang="ja-JP" altLang="en-US"/>
           </a:p>
@@ -2302,7 +2302,7 @@
           <a:p>
             <a:fld id="{E9CC885B-4903-4D54-9A93-00025F12DED9}" type="datetimeFigureOut">
               <a:rPr kumimoji="1" lang="ja-JP" altLang="en-US" smtClean="0"/>
-              <a:t>2025/1/27</a:t>
+              <a:t>2025/2/27</a:t>
             </a:fld>
             <a:endParaRPr kumimoji="1" lang="ja-JP" altLang="en-US"/>
           </a:p>
@@ -2645,7 +2645,7 @@
           <a:p>
             <a:fld id="{E9CC885B-4903-4D54-9A93-00025F12DED9}" type="datetimeFigureOut">
               <a:rPr kumimoji="1" lang="ja-JP" altLang="en-US" smtClean="0"/>
-              <a:t>2025/1/27</a:t>
+              <a:t>2025/2/27</a:t>
             </a:fld>
             <a:endParaRPr kumimoji="1" lang="ja-JP" altLang="en-US"/>
           </a:p>
@@ -2933,7 +2933,7 @@
           <a:p>
             <a:fld id="{E9CC885B-4903-4D54-9A93-00025F12DED9}" type="datetimeFigureOut">
               <a:rPr kumimoji="1" lang="ja-JP" altLang="en-US" smtClean="0"/>
-              <a:t>2025/1/27</a:t>
+              <a:t>2025/2/27</a:t>
             </a:fld>
             <a:endParaRPr kumimoji="1" lang="ja-JP" altLang="en-US"/>
           </a:p>
@@ -3206,7 +3206,7 @@
           <a:p>
             <a:fld id="{E9CC885B-4903-4D54-9A93-00025F12DED9}" type="datetimeFigureOut">
               <a:rPr kumimoji="1" lang="ja-JP" altLang="en-US" smtClean="0"/>
-              <a:t>2025/1/27</a:t>
+              <a:t>2025/2/27</a:t>
             </a:fld>
             <a:endParaRPr kumimoji="1" lang="ja-JP" altLang="en-US"/>
           </a:p>
@@ -3838,8 +3838,8 @@
         </p:nvSpPr>
         <p:spPr>
           <a:xfrm>
-            <a:off x="567542" y="1216429"/>
-            <a:ext cx="9417963" cy="3785652"/>
+            <a:off x="567542" y="1189534"/>
+            <a:ext cx="9725739" cy="3785652"/>
           </a:xfrm>
           <a:prstGeom prst="rect">
             <a:avLst/>
@@ -3895,7 +3895,7 @@
           <a:p>
             <a:r>
               <a:rPr lang="ja-JP" altLang="en-US" sz="2400" dirty="0"/>
-              <a:t>順番に作業して未然に防ぎましょう。</a:t>
+              <a:t>衝突を避けるように作業して未然に防ぎましょう。</a:t>
             </a:r>
             <a:endParaRPr lang="en-US" altLang="ja-JP" sz="2400" dirty="0"/>
           </a:p>
@@ -3932,7 +3932,7 @@
           <a:p>
             <a:r>
               <a:rPr lang="ja-JP" altLang="en-US" sz="2400" dirty="0"/>
-              <a:t>　気を付けましょう。（インスペクタを編集したときなど）</a:t>
+              <a:t>　気を付けましょう。（インスペクタで値を編集したときなど）</a:t>
             </a:r>
             <a:endParaRPr lang="en-US" altLang="ja-JP" sz="2400" dirty="0"/>
           </a:p>
@@ -4657,273 +4657,6 @@
               <a:t>この場合、どちらの編集を採用するのか決める必要があります。</a:t>
             </a:r>
             <a:endParaRPr lang="en-US" altLang="ja-JP" sz="2400" dirty="0"/>
-          </a:p>
-        </p:txBody>
-      </p:sp>
-      <p:pic>
-        <p:nvPicPr>
-          <p:cNvPr id="5" name="Picture 2" descr="後ろから見たパソコンを使う人のイラスト（男性）">
-            <a:extLst>
-              <a:ext uri="{FF2B5EF4-FFF2-40B4-BE49-F238E27FC236}">
-                <a16:creationId xmlns:a16="http://schemas.microsoft.com/office/drawing/2014/main" id="{651AD059-243A-432C-B192-E85AF0496F57}"/>
-              </a:ext>
-            </a:extLst>
-          </p:cNvPr>
-          <p:cNvPicPr>
-            <a:picLocks noChangeAspect="1" noChangeArrowheads="1"/>
-          </p:cNvPicPr>
-          <p:nvPr/>
-        </p:nvPicPr>
-        <p:blipFill>
-          <a:blip r:embed="rId2">
-            <a:extLst>
-              <a:ext uri="{28A0092B-C50C-407E-A947-70E740481C1C}">
-                <a14:useLocalDpi xmlns:a14="http://schemas.microsoft.com/office/drawing/2010/main" val="0"/>
-              </a:ext>
-            </a:extLst>
-          </a:blip>
-          <a:srcRect/>
-          <a:stretch>
-            <a:fillRect/>
-          </a:stretch>
-        </p:blipFill>
-        <p:spPr bwMode="auto">
-          <a:xfrm>
-            <a:off x="567542" y="3702580"/>
-            <a:ext cx="2923977" cy="2434212"/>
-          </a:xfrm>
-          <a:prstGeom prst="rect">
-            <a:avLst/>
-          </a:prstGeom>
-          <a:noFill/>
-          <a:extLst>
-            <a:ext uri="{909E8E84-426E-40DD-AFC4-6F175D3DCCD1}">
-              <a14:hiddenFill xmlns:a14="http://schemas.microsoft.com/office/drawing/2010/main">
-                <a:solidFill>
-                  <a:srgbClr val="FFFFFF"/>
-                </a:solidFill>
-              </a14:hiddenFill>
-            </a:ext>
-          </a:extLst>
-        </p:spPr>
-      </p:pic>
-      <p:sp>
-        <p:nvSpPr>
-          <p:cNvPr id="2" name="思考の吹き出し: 雲形 1">
-            <a:extLst>
-              <a:ext uri="{FF2B5EF4-FFF2-40B4-BE49-F238E27FC236}">
-                <a16:creationId xmlns:a16="http://schemas.microsoft.com/office/drawing/2014/main" id="{3EF74D8E-E3CA-44C3-9B94-89F4AB810CFB}"/>
-              </a:ext>
-            </a:extLst>
-          </p:cNvPr>
-          <p:cNvSpPr/>
-          <p:nvPr/>
-        </p:nvSpPr>
-        <p:spPr>
-          <a:xfrm>
-            <a:off x="3491519" y="3702580"/>
-            <a:ext cx="2133600" cy="1377420"/>
-          </a:xfrm>
-          <a:prstGeom prst="cloudCallout">
-            <a:avLst>
-              <a:gd name="adj1" fmla="val -60912"/>
-              <a:gd name="adj2" fmla="val 34225"/>
-            </a:avLst>
-          </a:prstGeom>
-        </p:spPr>
-        <p:style>
-          <a:lnRef idx="2">
-            <a:schemeClr val="accent1">
-              <a:shade val="50000"/>
-            </a:schemeClr>
-          </a:lnRef>
-          <a:fillRef idx="1">
-            <a:schemeClr val="accent1"/>
-          </a:fillRef>
-          <a:effectRef idx="0">
-            <a:schemeClr val="accent1"/>
-          </a:effectRef>
-          <a:fontRef idx="minor">
-            <a:schemeClr val="lt1"/>
-          </a:fontRef>
-        </p:style>
-        <p:txBody>
-          <a:bodyPr rtlCol="0" anchor="ctr"/>
-          <a:lstStyle/>
-          <a:p>
-            <a:pPr algn="ctr"/>
-            <a:r>
-              <a:rPr kumimoji="1" lang="en-US" altLang="ja-JP" b="1" dirty="0"/>
-              <a:t>HP</a:t>
-            </a:r>
-            <a:r>
-              <a:rPr kumimoji="1" lang="ja-JP" altLang="en-US" b="1" dirty="0"/>
-              <a:t>は</a:t>
-            </a:r>
-            <a:r>
-              <a:rPr kumimoji="1" lang="en-US" altLang="ja-JP" b="1" dirty="0"/>
-              <a:t>300</a:t>
-            </a:r>
-            <a:endParaRPr kumimoji="1" lang="ja-JP" altLang="en-US" b="1" dirty="0"/>
-          </a:p>
-        </p:txBody>
-      </p:sp>
-      <p:pic>
-        <p:nvPicPr>
-          <p:cNvPr id="10" name="Picture 2" descr="後ろから見たパソコンを使う人のイラスト（男性）">
-            <a:extLst>
-              <a:ext uri="{FF2B5EF4-FFF2-40B4-BE49-F238E27FC236}">
-                <a16:creationId xmlns:a16="http://schemas.microsoft.com/office/drawing/2014/main" id="{B459B74E-9F48-4633-9E0D-747810649828}"/>
-              </a:ext>
-            </a:extLst>
-          </p:cNvPr>
-          <p:cNvPicPr>
-            <a:picLocks noChangeAspect="1" noChangeArrowheads="1"/>
-          </p:cNvPicPr>
-          <p:nvPr/>
-        </p:nvPicPr>
-        <p:blipFill>
-          <a:blip r:embed="rId2">
-            <a:extLst>
-              <a:ext uri="{28A0092B-C50C-407E-A947-70E740481C1C}">
-                <a14:useLocalDpi xmlns:a14="http://schemas.microsoft.com/office/drawing/2010/main" val="0"/>
-              </a:ext>
-            </a:extLst>
-          </a:blip>
-          <a:srcRect/>
-          <a:stretch>
-            <a:fillRect/>
-          </a:stretch>
-        </p:blipFill>
-        <p:spPr bwMode="auto">
-          <a:xfrm>
-            <a:off x="6415496" y="3702580"/>
-            <a:ext cx="2923977" cy="2434212"/>
-          </a:xfrm>
-          <a:prstGeom prst="rect">
-            <a:avLst/>
-          </a:prstGeom>
-          <a:noFill/>
-          <a:extLst>
-            <a:ext uri="{909E8E84-426E-40DD-AFC4-6F175D3DCCD1}">
-              <a14:hiddenFill xmlns:a14="http://schemas.microsoft.com/office/drawing/2010/main">
-                <a:solidFill>
-                  <a:srgbClr val="FFFFFF"/>
-                </a:solidFill>
-              </a14:hiddenFill>
-            </a:ext>
-          </a:extLst>
-        </p:spPr>
-      </p:pic>
-      <p:sp>
-        <p:nvSpPr>
-          <p:cNvPr id="11" name="思考の吹き出し: 雲形 10">
-            <a:extLst>
-              <a:ext uri="{FF2B5EF4-FFF2-40B4-BE49-F238E27FC236}">
-                <a16:creationId xmlns:a16="http://schemas.microsoft.com/office/drawing/2014/main" id="{14E4C8FB-9AC9-40AC-B097-ACC7E08CEFA3}"/>
-              </a:ext>
-            </a:extLst>
-          </p:cNvPr>
-          <p:cNvSpPr/>
-          <p:nvPr/>
-        </p:nvSpPr>
-        <p:spPr>
-          <a:xfrm>
-            <a:off x="9339473" y="3702580"/>
-            <a:ext cx="2133600" cy="1377420"/>
-          </a:xfrm>
-          <a:prstGeom prst="cloudCallout">
-            <a:avLst>
-              <a:gd name="adj1" fmla="val -60912"/>
-              <a:gd name="adj2" fmla="val 34225"/>
-            </a:avLst>
-          </a:prstGeom>
-        </p:spPr>
-        <p:style>
-          <a:lnRef idx="2">
-            <a:schemeClr val="accent1">
-              <a:shade val="50000"/>
-            </a:schemeClr>
-          </a:lnRef>
-          <a:fillRef idx="1">
-            <a:schemeClr val="accent1"/>
-          </a:fillRef>
-          <a:effectRef idx="0">
-            <a:schemeClr val="accent1"/>
-          </a:effectRef>
-          <a:fontRef idx="minor">
-            <a:schemeClr val="lt1"/>
-          </a:fontRef>
-        </p:style>
-        <p:txBody>
-          <a:bodyPr rtlCol="0" anchor="ctr"/>
-          <a:lstStyle/>
-          <a:p>
-            <a:pPr algn="ctr"/>
-            <a:r>
-              <a:rPr kumimoji="1" lang="en-US" altLang="ja-JP" b="1" dirty="0"/>
-              <a:t>HP</a:t>
-            </a:r>
-            <a:r>
-              <a:rPr kumimoji="1" lang="ja-JP" altLang="en-US" b="1" dirty="0"/>
-              <a:t>は</a:t>
-            </a:r>
-            <a:r>
-              <a:rPr kumimoji="1" lang="en-US" altLang="ja-JP" b="1" dirty="0"/>
-              <a:t>500</a:t>
-            </a:r>
-            <a:endParaRPr kumimoji="1" lang="ja-JP" altLang="en-US" b="1" dirty="0"/>
-          </a:p>
-        </p:txBody>
-      </p:sp>
-      <p:sp>
-        <p:nvSpPr>
-          <p:cNvPr id="3" name="爆発: 8 pt 2">
-            <a:extLst>
-              <a:ext uri="{FF2B5EF4-FFF2-40B4-BE49-F238E27FC236}">
-                <a16:creationId xmlns:a16="http://schemas.microsoft.com/office/drawing/2014/main" id="{CB73D370-A21F-4FEE-BA4F-AE17FFF08F4B}"/>
-              </a:ext>
-            </a:extLst>
-          </p:cNvPr>
-          <p:cNvSpPr/>
-          <p:nvPr/>
-        </p:nvSpPr>
-        <p:spPr>
-          <a:xfrm>
-            <a:off x="4558319" y="4600171"/>
-            <a:ext cx="2923977" cy="2082800"/>
-          </a:xfrm>
-          <a:prstGeom prst="irregularSeal1">
-            <a:avLst/>
-          </a:prstGeom>
-        </p:spPr>
-        <p:style>
-          <a:lnRef idx="3">
-            <a:schemeClr val="lt1"/>
-          </a:lnRef>
-          <a:fillRef idx="1">
-            <a:schemeClr val="accent4"/>
-          </a:fillRef>
-          <a:effectRef idx="1">
-            <a:schemeClr val="accent4"/>
-          </a:effectRef>
-          <a:fontRef idx="minor">
-            <a:schemeClr val="lt1"/>
-          </a:fontRef>
-        </p:style>
-        <p:txBody>
-          <a:bodyPr rtlCol="0" anchor="ctr"/>
-          <a:lstStyle/>
-          <a:p>
-            <a:pPr algn="ctr"/>
-            <a:r>
-              <a:rPr kumimoji="1" lang="ja-JP" altLang="en-US" b="1" dirty="0">
-                <a:solidFill>
-                  <a:srgbClr val="FF0000"/>
-                </a:solidFill>
-              </a:rPr>
-              <a:t>衝突！！</a:t>
-            </a:r>
           </a:p>
         </p:txBody>
       </p:sp>
